--- a/01_FoundationProjects/MFL11_Encoder_Motor_PID/MFL11_Encoder_Motor_PID.pptx
+++ b/01_FoundationProjects/MFL11_Encoder_Motor_PID/MFL11_Encoder_Motor_PID.pptx
@@ -266,7 +266,7 @@
           <a:p>
             <a:fld id="{375049E3-AEF5-412D-9F98-5201579F9569}" type="datetimeFigureOut">
               <a:rPr lang="en-GB" smtClean="0"/>
-              <a:t>26/12/2025</a:t>
+              <a:t>18/01/2026</a:t>
             </a:fld>
             <a:endParaRPr lang="en-GB"/>
           </a:p>
@@ -466,7 +466,7 @@
           <a:p>
             <a:fld id="{375049E3-AEF5-412D-9F98-5201579F9569}" type="datetimeFigureOut">
               <a:rPr lang="en-GB" smtClean="0"/>
-              <a:t>26/12/2025</a:t>
+              <a:t>18/01/2026</a:t>
             </a:fld>
             <a:endParaRPr lang="en-GB"/>
           </a:p>
@@ -676,7 +676,7 @@
           <a:p>
             <a:fld id="{375049E3-AEF5-412D-9F98-5201579F9569}" type="datetimeFigureOut">
               <a:rPr lang="en-GB" smtClean="0"/>
-              <a:t>26/12/2025</a:t>
+              <a:t>18/01/2026</a:t>
             </a:fld>
             <a:endParaRPr lang="en-GB"/>
           </a:p>
@@ -876,7 +876,7 @@
           <a:p>
             <a:fld id="{375049E3-AEF5-412D-9F98-5201579F9569}" type="datetimeFigureOut">
               <a:rPr lang="en-GB" smtClean="0"/>
-              <a:t>26/12/2025</a:t>
+              <a:t>18/01/2026</a:t>
             </a:fld>
             <a:endParaRPr lang="en-GB"/>
           </a:p>
@@ -1152,7 +1152,7 @@
           <a:p>
             <a:fld id="{375049E3-AEF5-412D-9F98-5201579F9569}" type="datetimeFigureOut">
               <a:rPr lang="en-GB" smtClean="0"/>
-              <a:t>26/12/2025</a:t>
+              <a:t>18/01/2026</a:t>
             </a:fld>
             <a:endParaRPr lang="en-GB"/>
           </a:p>
@@ -1420,7 +1420,7 @@
           <a:p>
             <a:fld id="{375049E3-AEF5-412D-9F98-5201579F9569}" type="datetimeFigureOut">
               <a:rPr lang="en-GB" smtClean="0"/>
-              <a:t>26/12/2025</a:t>
+              <a:t>18/01/2026</a:t>
             </a:fld>
             <a:endParaRPr lang="en-GB"/>
           </a:p>
@@ -1835,7 +1835,7 @@
           <a:p>
             <a:fld id="{375049E3-AEF5-412D-9F98-5201579F9569}" type="datetimeFigureOut">
               <a:rPr lang="en-GB" smtClean="0"/>
-              <a:t>26/12/2025</a:t>
+              <a:t>18/01/2026</a:t>
             </a:fld>
             <a:endParaRPr lang="en-GB"/>
           </a:p>
@@ -1977,7 +1977,7 @@
           <a:p>
             <a:fld id="{375049E3-AEF5-412D-9F98-5201579F9569}" type="datetimeFigureOut">
               <a:rPr lang="en-GB" smtClean="0"/>
-              <a:t>26/12/2025</a:t>
+              <a:t>18/01/2026</a:t>
             </a:fld>
             <a:endParaRPr lang="en-GB"/>
           </a:p>
@@ -2090,7 +2090,7 @@
           <a:p>
             <a:fld id="{375049E3-AEF5-412D-9F98-5201579F9569}" type="datetimeFigureOut">
               <a:rPr lang="en-GB" smtClean="0"/>
-              <a:t>26/12/2025</a:t>
+              <a:t>18/01/2026</a:t>
             </a:fld>
             <a:endParaRPr lang="en-GB"/>
           </a:p>
@@ -2403,7 +2403,7 @@
           <a:p>
             <a:fld id="{375049E3-AEF5-412D-9F98-5201579F9569}" type="datetimeFigureOut">
               <a:rPr lang="en-GB" smtClean="0"/>
-              <a:t>26/12/2025</a:t>
+              <a:t>18/01/2026</a:t>
             </a:fld>
             <a:endParaRPr lang="en-GB"/>
           </a:p>
@@ -2692,7 +2692,7 @@
           <a:p>
             <a:fld id="{375049E3-AEF5-412D-9F98-5201579F9569}" type="datetimeFigureOut">
               <a:rPr lang="en-GB" smtClean="0"/>
-              <a:t>26/12/2025</a:t>
+              <a:t>18/01/2026</a:t>
             </a:fld>
             <a:endParaRPr lang="en-GB"/>
           </a:p>
@@ -2935,7 +2935,7 @@
           <a:p>
             <a:fld id="{375049E3-AEF5-412D-9F98-5201579F9569}" type="datetimeFigureOut">
               <a:rPr lang="en-GB" smtClean="0"/>
-              <a:t>26/12/2025</a:t>
+              <a:t>18/01/2026</a:t>
             </a:fld>
             <a:endParaRPr lang="en-GB"/>
           </a:p>
@@ -4425,7 +4425,7 @@
           <a:lstStyle/>
           <a:p>
             <a:r>
-              <a:rPr lang="en-GB"/>
+              <a:rPr lang="en-GB" dirty="0"/>
               <a:t>06/12/2025</a:t>
             </a:r>
           </a:p>
@@ -5039,7 +5039,7 @@
         <p:spPr>
           <a:xfrm>
             <a:off x="5561772" y="5899763"/>
-            <a:ext cx="6097656" cy="923330"/>
+            <a:ext cx="6097656" cy="1200329"/>
           </a:xfrm>
           <a:prstGeom prst="rect">
             <a:avLst/>
@@ -5058,9 +5058,15 @@
           <a:lstStyle/>
           <a:p>
             <a:r>
-              <a:rPr lang="en-GB" dirty="0"/>
-              <a:t>https://github.com/info-zas/zas-robotics-motion/blob/main/01_FoundationProjects/MFL11/MFL11/MFL11.ino</a:t>
-            </a:r>
+              <a:rPr lang="en-GB" dirty="0">
+                <a:hlinkClick r:id="rId4"/>
+              </a:rPr>
+              <a:t>https://github.com/info-zas/zas-robotics-motion/tree/main/01_FoundationProjects/MFL11_Encoder_Motor_PID/MFL11_Encoder_Motor_PID</a:t>
+            </a:r>
+            <a:endParaRPr lang="en-GB" dirty="0"/>
+          </a:p>
+          <a:p>
+            <a:endParaRPr lang="en-GB" dirty="0"/>
           </a:p>
         </p:txBody>
       </p:sp>
